--- a/docs/ImageScope.pptx
+++ b/docs/ImageScope.pptx
@@ -716,7 +716,7 @@
           <a:lstStyle/>
           <a:p>
             <a:r>
-              <a:t>Одна и та же обложка пропущена через разные пресеты. Главный практический пресет — «Карточка товара»: автоконтраст, подъём теней, резкость.</a:t>
+              <a:t>Одни и те же обои пропущена через разные пресеты. Главный практический пресет — «Карточка товара»: автоконтраст, подъём теней, резкость.</a:t>
             </a:r>
           </a:p>
         </p:txBody>
@@ -3912,7 +3912,7 @@
                 </a:solidFill>
                 <a:latin typeface="Cambria"/>
               </a:rPr>
-              <a:t>100</a:t>
+              <a:t>120</a:t>
             </a:r>
           </a:p>
         </p:txBody>
@@ -3951,7 +3951,7 @@
                 </a:solidFill>
                 <a:latin typeface="Calibri"/>
               </a:rPr>
-              <a:t>обложек с books.toscrape.com</a:t>
+              <a:t>обоев с wallpaperscraft.com</a:t>
             </a:r>
           </a:p>
         </p:txBody>
@@ -4128,8 +4128,8 @@
         </p:blipFill>
         <p:spPr>
           <a:xfrm>
-            <a:off x="7498079" y="1097280"/>
-            <a:ext cx="1863606" cy="2468880"/>
+            <a:off x="7498079" y="914400"/>
+            <a:ext cx="4114800" cy="2304288"/>
           </a:xfrm>
           <a:prstGeom prst="rect">
             <a:avLst/>
@@ -4152,8 +4152,8 @@
         </p:blipFill>
         <p:spPr>
           <a:xfrm>
-            <a:off x="9784080" y="3200400"/>
-            <a:ext cx="1863606" cy="2468880"/>
+            <a:off x="7498079" y="3749039"/>
+            <a:ext cx="4114800" cy="2304288"/>
           </a:xfrm>
           <a:prstGeom prst="rect">
             <a:avLst/>
@@ -4168,7 +4168,7 @@
         </p:nvSpPr>
         <p:spPr>
           <a:xfrm>
-            <a:off x="7498079" y="3749039"/>
+            <a:off x="7498079" y="3246120"/>
             <a:ext cx="2194560" cy="457200"/>
           </a:xfrm>
           <a:prstGeom prst="rect">
@@ -4207,8 +4207,8 @@
         </p:nvSpPr>
         <p:spPr>
           <a:xfrm>
-            <a:off x="9784080" y="5806440"/>
-            <a:ext cx="2194560" cy="457200"/>
+            <a:off x="7498079" y="6172200"/>
+            <a:ext cx="2743200" cy="457200"/>
           </a:xfrm>
           <a:prstGeom prst="rect">
             <a:avLst/>
@@ -4337,7 +4337,7 @@
                 </a:solidFill>
                 <a:latin typeface="Calibri"/>
               </a:rPr>
-              <a:t>Карточки товаров в каталоге разные: тёмные, малоконтрастные, неровные. ImageScope находит их на реальном сайте, считает метрики и применяет фильтры — пользователь сразу видит эффект.</a:t>
+              <a:t>Картинки каталога разные: тёмные, малоконтрастные, неровные. ImageScope находит их на реальном сайте (WallpapersCraft, раздел Art), считает метрики и применяет фильтры — пользователь сразу видит эффект.</a:t>
             </a:r>
           </a:p>
         </p:txBody>
@@ -5803,8 +5803,8 @@
         </p:blipFill>
         <p:spPr>
           <a:xfrm>
-            <a:off x="685800" y="1600200"/>
-            <a:ext cx="1828800" cy="2560320"/>
+            <a:off x="685800" y="2286000"/>
+            <a:ext cx="1828800" cy="1024128"/>
           </a:xfrm>
           <a:prstGeom prst="rect">
             <a:avLst/>
@@ -5884,7 +5884,7 @@
                 </a:solidFill>
                 <a:latin typeface="Calibri"/>
               </a:rPr>
-              <a:t>в среднем: яркость 114, контраст 50</a:t>
+              <a:t>в среднем: яркость 83, контраст 50</a:t>
             </a:r>
           </a:p>
         </p:txBody>
@@ -5950,8 +5950,8 @@
         </p:blipFill>
         <p:spPr>
           <a:xfrm>
-            <a:off x="2971800" y="1600200"/>
-            <a:ext cx="1828800" cy="2560320"/>
+            <a:off x="2971800" y="2286000"/>
+            <a:ext cx="1828800" cy="1024128"/>
           </a:xfrm>
           <a:prstGeom prst="rect">
             <a:avLst/>
@@ -6031,7 +6031,7 @@
                 </a:solidFill>
                 <a:latin typeface="Calibri"/>
               </a:rPr>
-              <a:t>в среднем: яркость 147, контраст 70</a:t>
+              <a:t>в среднем: яркость 109, контраст 62</a:t>
             </a:r>
           </a:p>
         </p:txBody>
@@ -6097,8 +6097,8 @@
         </p:blipFill>
         <p:spPr>
           <a:xfrm>
-            <a:off x="5257800" y="1600200"/>
-            <a:ext cx="1828800" cy="2560320"/>
+            <a:off x="5257800" y="2286000"/>
+            <a:ext cx="1828800" cy="1024128"/>
           </a:xfrm>
           <a:prstGeom prst="rect">
             <a:avLst/>
@@ -6244,8 +6244,8 @@
         </p:blipFill>
         <p:spPr>
           <a:xfrm>
-            <a:off x="7543800" y="1600200"/>
-            <a:ext cx="1828800" cy="2560320"/>
+            <a:off x="7543800" y="2286000"/>
+            <a:ext cx="1828800" cy="1024128"/>
           </a:xfrm>
           <a:prstGeom prst="rect">
             <a:avLst/>
@@ -6391,8 +6391,8 @@
         </p:blipFill>
         <p:spPr>
           <a:xfrm>
-            <a:off x="9829800" y="1600200"/>
-            <a:ext cx="1828800" cy="2560320"/>
+            <a:off x="9829800" y="2286000"/>
+            <a:ext cx="1828800" cy="1024128"/>
           </a:xfrm>
           <a:prstGeom prst="rect">
             <a:avLst/>
@@ -6511,7 +6511,7 @@
                 </a:solidFill>
                 <a:latin typeface="Calibri"/>
               </a:rPr>
-              <a:t>Средние по 6 обложкам: «Карточка товара» поднимает яркость 114 → 147 и контраст 50 → 70 — каталог выглядит чище и единообразнее.</a:t>
+              <a:t>Средние по 6 обоям: «Карточка товара» поднимает яркость 83 → 109 и контраст 50 → 62 — каталог выглядит чище и единообразнее.</a:t>
             </a:r>
           </a:p>
         </p:txBody>
@@ -6953,7 +6953,7 @@
                 </a:solidFill>
                 <a:latin typeface="Calibri"/>
               </a:rPr>
-              <a:t>• Рабочая цепочка от сбора до «до/после» на реальном сайте, 100 изображений</a:t>
+              <a:t>• Рабочая цепочка от сбора до «до/после» на реальном сайте, 120 изображений</a:t>
             </a:r>
           </a:p>
           <a:p>
